--- a/session3/exam-strategy/q3/q3_exam_strategy.pptx
+++ b/session3/exam-strategy/q3/q3_exam_strategy.pptx
@@ -3187,8 +3187,8 @@
         </p:nvSpPr>
         <p:spPr>
           <a:xfrm>
-            <a:off x="274320" y="685800"/>
-            <a:ext cx="6400800" cy="1645920"/>
+            <a:off x="274320" y="640080"/>
+            <a:ext cx="6583680" cy="1280160"/>
           </a:xfrm>
           <a:prstGeom prst="rect">
             <a:avLst/>
@@ -3196,13 +3196,13 @@
           <a:noFill/>
         </p:spPr>
         <p:txBody>
-          <a:bodyPr wrap="square">
+          <a:bodyPr wrap="square" tIns="0" bIns="0">
             <a:spAutoFit/>
           </a:bodyPr>
           <a:lstStyle/>
           <a:p>
             <a:pPr>
-              <a:defRPr sz="1100">
+              <a:defRPr sz="900">
                 <a:solidFill>
                   <a:srgbClr val="FFFFFF"/>
                 </a:solidFill>
@@ -3210,7 +3210,7 @@
               </a:defRPr>
             </a:pPr>
             <a:r>
-              <a:t>A developer uses the AWS SDK for C++ to retrieve data from an Amazon DynamoDB table. The data is sometimes retrieved using a known key, and sometimes the key is not known, resulting in multiple items being returned. The developer wants to ensure the code returns only one item when retrieving data without keys. Which DynamoDB setting will meet these requirements?</a:t>
+              <a:t>A developer uses the AWS SDK for C++ to retrieve data from an Amazon DynamoDB table. The data is sometimes retrieved using a known key, and sometimes the key is not known, resulting in multiple items being returned. The developer wants to ensure the code returns only one item when retrieving data without keys. Which DynamoDB setting will meet th...</a:t>
             </a:r>
           </a:p>
         </p:txBody>
@@ -3223,8 +3223,8 @@
         </p:nvSpPr>
         <p:spPr>
           <a:xfrm>
-            <a:off x="365760" y="2377440"/>
-            <a:ext cx="274320" cy="274320"/>
+            <a:off x="274320" y="2057400"/>
+            <a:ext cx="201168" cy="201168"/>
           </a:xfrm>
           <a:prstGeom prst="ellipse">
             <a:avLst/>
@@ -3255,7 +3255,7 @@
           <a:lstStyle/>
           <a:p>
             <a:pPr algn="ctr">
-              <a:defRPr sz="900" b="1">
+              <a:defRPr sz="700" b="1">
                 <a:solidFill>
                   <a:srgbClr val="FFFFFF"/>
                 </a:solidFill>
@@ -3275,8 +3275,8 @@
         </p:nvSpPr>
         <p:spPr>
           <a:xfrm>
-            <a:off x="777240" y="2377440"/>
-            <a:ext cx="5943600" cy="411480"/>
+            <a:off x="548640" y="2011680"/>
+            <a:ext cx="6400800" cy="736092"/>
           </a:xfrm>
           <a:prstGeom prst="rect">
             <a:avLst/>
@@ -3284,13 +3284,13 @@
           <a:noFill/>
         </p:spPr>
         <p:txBody>
-          <a:bodyPr wrap="square">
+          <a:bodyPr wrap="square" tIns="25400" bIns="0" lIns="0">
             <a:spAutoFit/>
           </a:bodyPr>
           <a:lstStyle/>
           <a:p>
             <a:pPr>
-              <a:defRPr sz="1000">
+              <a:defRPr sz="800">
                 <a:solidFill>
                   <a:srgbClr val="CCCCCC"/>
                 </a:solidFill>
@@ -3298,7 +3298,7 @@
               </a:defRPr>
             </a:pPr>
             <a:r>
-              <a:t>The parallel scan operation can logically divide a table into multiple segments, with multiple application workers scann</a:t>
+              <a:t>The parallel scan operation can logically divide a table into multiple segments, with multiple appli</a:t>
             </a:r>
           </a:p>
         </p:txBody>
@@ -3311,8 +3311,8 @@
         </p:nvSpPr>
         <p:spPr>
           <a:xfrm>
-            <a:off x="365760" y="2834640"/>
-            <a:ext cx="274320" cy="274320"/>
+            <a:off x="274320" y="2811780"/>
+            <a:ext cx="201168" cy="201168"/>
           </a:xfrm>
           <a:prstGeom prst="ellipse">
             <a:avLst/>
@@ -3343,7 +3343,7 @@
           <a:lstStyle/>
           <a:p>
             <a:pPr algn="ctr">
-              <a:defRPr sz="900" b="1">
+              <a:defRPr sz="700" b="1">
                 <a:solidFill>
                   <a:srgbClr val="FFFFFF"/>
                 </a:solidFill>
@@ -3363,8 +3363,8 @@
         </p:nvSpPr>
         <p:spPr>
           <a:xfrm>
-            <a:off x="777240" y="2834640"/>
-            <a:ext cx="5943600" cy="411480"/>
+            <a:off x="548640" y="2766060"/>
+            <a:ext cx="6400800" cy="736092"/>
           </a:xfrm>
           <a:prstGeom prst="rect">
             <a:avLst/>
@@ -3372,13 +3372,13 @@
           <a:noFill/>
         </p:spPr>
         <p:txBody>
-          <a:bodyPr wrap="square">
+          <a:bodyPr wrap="square" tIns="25400" bIns="0" lIns="0">
             <a:spAutoFit/>
           </a:bodyPr>
           <a:lstStyle/>
           <a:p>
             <a:pPr>
-              <a:defRPr sz="1000">
+              <a:defRPr sz="800">
                 <a:solidFill>
                   <a:srgbClr val="CCCCCC"/>
                 </a:solidFill>
@@ -3386,7 +3386,7 @@
               </a:defRPr>
             </a:pPr>
             <a:r>
-              <a:t>A filter expression applies additional matching criteria to limit the items returned. This expression does not provide a</a:t>
+              <a:t>A filter expression applies additional matching criteria to limit the items returned. This expressio</a:t>
             </a:r>
           </a:p>
         </p:txBody>
@@ -3399,8 +3399,8 @@
         </p:nvSpPr>
         <p:spPr>
           <a:xfrm>
-            <a:off x="365760" y="3291840"/>
-            <a:ext cx="274320" cy="274320"/>
+            <a:off x="274320" y="3566160"/>
+            <a:ext cx="201168" cy="201168"/>
           </a:xfrm>
           <a:prstGeom prst="ellipse">
             <a:avLst/>
@@ -3431,7 +3431,7 @@
           <a:lstStyle/>
           <a:p>
             <a:pPr algn="ctr">
-              <a:defRPr sz="900" b="1">
+              <a:defRPr sz="700" b="1">
                 <a:solidFill>
                   <a:srgbClr val="FFFFFF"/>
                 </a:solidFill>
@@ -3451,8 +3451,8 @@
         </p:nvSpPr>
         <p:spPr>
           <a:xfrm>
-            <a:off x="777240" y="3291840"/>
-            <a:ext cx="5943600" cy="411480"/>
+            <a:off x="548640" y="3520440"/>
+            <a:ext cx="6400800" cy="736092"/>
           </a:xfrm>
           <a:prstGeom prst="rect">
             <a:avLst/>
@@ -3460,13 +3460,13 @@
           <a:noFill/>
         </p:spPr>
         <p:txBody>
-          <a:bodyPr wrap="square">
+          <a:bodyPr wrap="square" tIns="25400" bIns="0" lIns="0">
             <a:spAutoFit/>
           </a:bodyPr>
           <a:lstStyle/>
           <a:p>
             <a:pPr>
-              <a:defRPr sz="1000">
+              <a:defRPr sz="800">
                 <a:solidFill>
                   <a:srgbClr val="CCCCCC"/>
                 </a:solidFill>
@@ -3474,7 +3474,7 @@
               </a:defRPr>
             </a:pPr>
             <a:r>
-              <a:t>Set the limit parameter to 1 to set the maximum number of items that need to be retrieved with a DynamoDB scan operation</a:t>
+              <a:t>Set the limit parameter to 1 to set the maximum number of items that need to be retrieved with a Dyn</a:t>
             </a:r>
           </a:p>
         </p:txBody>
@@ -3487,8 +3487,8 @@
         </p:nvSpPr>
         <p:spPr>
           <a:xfrm>
-            <a:off x="365760" y="3749039"/>
-            <a:ext cx="274320" cy="274320"/>
+            <a:off x="274320" y="4320540"/>
+            <a:ext cx="201168" cy="201168"/>
           </a:xfrm>
           <a:prstGeom prst="ellipse">
             <a:avLst/>
@@ -3519,7 +3519,7 @@
           <a:lstStyle/>
           <a:p>
             <a:pPr algn="ctr">
-              <a:defRPr sz="900" b="1">
+              <a:defRPr sz="700" b="1">
                 <a:solidFill>
                   <a:srgbClr val="FFFFFF"/>
                 </a:solidFill>
@@ -3539,8 +3539,8 @@
         </p:nvSpPr>
         <p:spPr>
           <a:xfrm>
-            <a:off x="777240" y="3749039"/>
-            <a:ext cx="5943600" cy="411480"/>
+            <a:off x="548640" y="4274820"/>
+            <a:ext cx="6400800" cy="736092"/>
           </a:xfrm>
           <a:prstGeom prst="rect">
             <a:avLst/>
@@ -3548,13 +3548,13 @@
           <a:noFill/>
         </p:spPr>
         <p:txBody>
-          <a:bodyPr wrap="square">
+          <a:bodyPr wrap="square" tIns="25400" bIns="0" lIns="0">
             <a:spAutoFit/>
           </a:bodyPr>
           <a:lstStyle/>
           <a:p>
             <a:pPr>
-              <a:defRPr sz="1000">
+              <a:defRPr sz="800">
                 <a:solidFill>
                   <a:srgbClr val="CCCCCC"/>
                 </a:solidFill>
@@ -3562,7 +3562,7 @@
               </a:defRPr>
             </a:pPr>
             <a:r>
-              <a:t>The page-size parameter will determine the number of items returned in each page of a query. This method is only relevan</a:t>
+              <a:t>The page-size parameter will determine the number of items returned in each page of a query. This me</a:t>
             </a:r>
           </a:p>
         </p:txBody>
@@ -3844,8 +3844,8 @@
         </p:blipFill>
         <p:spPr>
           <a:xfrm>
-            <a:off x="182880" y="914400"/>
-            <a:ext cx="5280660" cy="3840480"/>
+            <a:off x="182880" y="995897"/>
+            <a:ext cx="5303520" cy="3677485"/>
           </a:xfrm>
           <a:prstGeom prst="rect">
             <a:avLst/>
@@ -3980,9 +3980,9 @@
           <a:p>
             <a:pPr>
               <a:spcAft>
-                <a:spcPts val="600"/>
+                <a:spcPts val="400"/>
               </a:spcAft>
-              <a:defRPr sz="900">
+              <a:defRPr sz="800">
                 <a:solidFill>
                   <a:srgbClr val="212121"/>
                 </a:solidFill>
@@ -3990,15 +3990,15 @@
               </a:defRPr>
             </a:pPr>
             <a:r>
-              <a:t>• The parallel scan operation can logically divide a table into multiple segments, with multiple application workers scanning the segments in parallel.</a:t>
+              <a:t>• The parallel scan operation can logically divide a table into multiple segments</a:t>
             </a:r>
           </a:p>
           <a:p>
             <a:pPr>
               <a:spcAft>
-                <a:spcPts val="600"/>
+                <a:spcPts val="400"/>
               </a:spcAft>
-              <a:defRPr sz="900">
+              <a:defRPr sz="800">
                 <a:solidFill>
                   <a:srgbClr val="212121"/>
                 </a:solidFill>
@@ -4006,15 +4006,15 @@
               </a:defRPr>
             </a:pPr>
             <a:r>
-              <a:t>• Parallel scan returns the same number of results as an ordinary scan, except the results can be returned more quickly.</a:t>
+              <a:t>• With multiple application workers scanning the segments in parallel</a:t>
             </a:r>
           </a:p>
           <a:p>
             <a:pPr>
               <a:spcAft>
-                <a:spcPts val="600"/>
+                <a:spcPts val="400"/>
               </a:spcAft>
-              <a:defRPr sz="900">
+              <a:defRPr sz="800">
                 <a:solidFill>
                   <a:srgbClr val="212121"/>
                 </a:solidFill>
@@ -4022,7 +4022,39 @@
               </a:defRPr>
             </a:pPr>
             <a:r>
-              <a:t>• Parallel scan does not limit the number of items returned.</a:t>
+              <a:t>• Parallel scan returns the same number of results as an ordinary scan</a:t>
+            </a:r>
+          </a:p>
+          <a:p>
+            <a:pPr>
+              <a:spcAft>
+                <a:spcPts val="400"/>
+              </a:spcAft>
+              <a:defRPr sz="800">
+                <a:solidFill>
+                  <a:srgbClr val="212121"/>
+                </a:solidFill>
+                <a:latin typeface="Segoe UI"/>
+              </a:defRPr>
+            </a:pPr>
+            <a:r>
+              <a:t>• Except the results can be returned more quickly</a:t>
+            </a:r>
+          </a:p>
+          <a:p>
+            <a:pPr>
+              <a:spcAft>
+                <a:spcPts val="400"/>
+              </a:spcAft>
+              <a:defRPr sz="800">
+                <a:solidFill>
+                  <a:srgbClr val="212121"/>
+                </a:solidFill>
+                <a:latin typeface="Segoe UI"/>
+              </a:defRPr>
+            </a:pPr>
+            <a:r>
+              <a:t>• Parallel scan does not limit the number of items returned</a:t>
             </a:r>
           </a:p>
         </p:txBody>
@@ -4201,8 +4233,8 @@
         </p:blipFill>
         <p:spPr>
           <a:xfrm>
-            <a:off x="182880" y="914400"/>
-            <a:ext cx="5280660" cy="3840480"/>
+            <a:off x="182880" y="1717415"/>
+            <a:ext cx="5303520" cy="2234448"/>
           </a:xfrm>
           <a:prstGeom prst="rect">
             <a:avLst/>
@@ -4337,9 +4369,9 @@
           <a:p>
             <a:pPr>
               <a:spcAft>
-                <a:spcPts val="600"/>
+                <a:spcPts val="400"/>
               </a:spcAft>
-              <a:defRPr sz="900">
+              <a:defRPr sz="800">
                 <a:solidFill>
                   <a:srgbClr val="212121"/>
                 </a:solidFill>
@@ -4347,15 +4379,15 @@
               </a:defRPr>
             </a:pPr>
             <a:r>
-              <a:t>• A filter expression applies additional matching criteria to limit the items returned.</a:t>
+              <a:t>• A filter expression applies additional matching criteria to limit the items returned</a:t>
             </a:r>
           </a:p>
           <a:p>
             <a:pPr>
               <a:spcAft>
-                <a:spcPts val="600"/>
+                <a:spcPts val="400"/>
               </a:spcAft>
-              <a:defRPr sz="900">
+              <a:defRPr sz="800">
                 <a:solidFill>
                   <a:srgbClr val="212121"/>
                 </a:solidFill>
@@ -4363,7 +4395,7 @@
               </a:defRPr>
             </a:pPr>
             <a:r>
-              <a:t>• This expression does not provide a specific limit on the number of items returned.</a:t>
+              <a:t>• This expression does not provide a specific limit on the number of items returned</a:t>
             </a:r>
           </a:p>
         </p:txBody>
@@ -4542,8 +4574,8 @@
         </p:blipFill>
         <p:spPr>
           <a:xfrm>
-            <a:off x="182880" y="914400"/>
-            <a:ext cx="3115683" cy="3840480"/>
+            <a:off x="182880" y="1217299"/>
+            <a:ext cx="5303520" cy="3234680"/>
           </a:xfrm>
           <a:prstGeom prst="rect">
             <a:avLst/>
@@ -4678,9 +4710,9 @@
           <a:p>
             <a:pPr>
               <a:spcAft>
-                <a:spcPts val="600"/>
+                <a:spcPts val="400"/>
               </a:spcAft>
-              <a:defRPr sz="900">
+              <a:defRPr sz="800">
                 <a:solidFill>
                   <a:srgbClr val="212121"/>
                 </a:solidFill>
@@ -4688,7 +4720,7 @@
               </a:defRPr>
             </a:pPr>
             <a:r>
-              <a:t>• Set the limit parameter to 1 to set the maximum number of items that need to be retrieved with a DynamoDB scan operation.</a:t>
+              <a:t>• Set the limit parameter to 1 to set the maximum number of items that need to be retrieved with a DynamoDB scan operation</a:t>
             </a:r>
           </a:p>
         </p:txBody>
@@ -4867,8 +4899,8 @@
         </p:blipFill>
         <p:spPr>
           <a:xfrm>
-            <a:off x="182880" y="914400"/>
-            <a:ext cx="5280660" cy="3840480"/>
+            <a:off x="182880" y="1836497"/>
+            <a:ext cx="5303520" cy="1996284"/>
           </a:xfrm>
           <a:prstGeom prst="rect">
             <a:avLst/>
@@ -5003,9 +5035,9 @@
           <a:p>
             <a:pPr>
               <a:spcAft>
-                <a:spcPts val="600"/>
+                <a:spcPts val="400"/>
               </a:spcAft>
-              <a:defRPr sz="900">
+              <a:defRPr sz="800">
                 <a:solidFill>
                   <a:srgbClr val="212121"/>
                 </a:solidFill>
@@ -5013,15 +5045,15 @@
               </a:defRPr>
             </a:pPr>
             <a:r>
-              <a:t>• The page-size parameter will determine the number of items returned in each page of a query.</a:t>
+              <a:t>• The page-size parameter will determine the number of items returned in each page of a query</a:t>
             </a:r>
           </a:p>
           <a:p>
             <a:pPr>
               <a:spcAft>
-                <a:spcPts val="600"/>
+                <a:spcPts val="400"/>
               </a:spcAft>
-              <a:defRPr sz="900">
+              <a:defRPr sz="800">
                 <a:solidFill>
                   <a:srgbClr val="212121"/>
                 </a:solidFill>
@@ -5029,7 +5061,7 @@
               </a:defRPr>
             </a:pPr>
             <a:r>
-              <a:t>• This method is only relevant for queries that involve the key.</a:t>
+              <a:t>• This method is only relevant for queries that involve the key</a:t>
             </a:r>
           </a:p>
         </p:txBody>

--- a/session3/exam-strategy/q3/q3_exam_strategy.pptx
+++ b/session3/exam-strategy/q3/q3_exam_strategy.pptx
@@ -3187,8 +3187,8 @@
         </p:nvSpPr>
         <p:spPr>
           <a:xfrm>
-            <a:off x="274320" y="640080"/>
-            <a:ext cx="6583680" cy="1280160"/>
+            <a:off x="274320" y="685800"/>
+            <a:ext cx="6400800" cy="1645920"/>
           </a:xfrm>
           <a:prstGeom prst="rect">
             <a:avLst/>
@@ -3196,13 +3196,13 @@
           <a:noFill/>
         </p:spPr>
         <p:txBody>
-          <a:bodyPr wrap="square" tIns="0" bIns="0">
+          <a:bodyPr wrap="square">
             <a:spAutoFit/>
           </a:bodyPr>
           <a:lstStyle/>
           <a:p>
             <a:pPr>
-              <a:defRPr sz="900">
+              <a:defRPr sz="1100">
                 <a:solidFill>
                   <a:srgbClr val="FFFFFF"/>
                 </a:solidFill>
@@ -3210,7 +3210,7 @@
               </a:defRPr>
             </a:pPr>
             <a:r>
-              <a:t>A developer uses the AWS SDK for C++ to retrieve data from an Amazon DynamoDB table. The data is sometimes retrieved using a known key, and sometimes the key is not known, resulting in multiple items being returned. The developer wants to ensure the code returns only one item when retrieving data without keys. Which DynamoDB setting will meet th...</a:t>
+              <a:t>A developer uses the AWS SDK for C++ to retrieve data from an Amazon DynamoDB table. The data is sometimes retrieved using a known key, and sometimes the key is not known, resulting in multiple items being returned. The developer wants to ensure the code returns only one item when retrieving data without keys. Which DynamoDB setting will meet these requirements?</a:t>
             </a:r>
           </a:p>
         </p:txBody>
@@ -3223,8 +3223,8 @@
         </p:nvSpPr>
         <p:spPr>
           <a:xfrm>
-            <a:off x="274320" y="2057400"/>
-            <a:ext cx="201168" cy="201168"/>
+            <a:off x="365760" y="2377440"/>
+            <a:ext cx="274320" cy="274320"/>
           </a:xfrm>
           <a:prstGeom prst="ellipse">
             <a:avLst/>
@@ -3255,7 +3255,7 @@
           <a:lstStyle/>
           <a:p>
             <a:pPr algn="ctr">
-              <a:defRPr sz="700" b="1">
+              <a:defRPr sz="900" b="1">
                 <a:solidFill>
                   <a:srgbClr val="FFFFFF"/>
                 </a:solidFill>
@@ -3275,8 +3275,8 @@
         </p:nvSpPr>
         <p:spPr>
           <a:xfrm>
-            <a:off x="548640" y="2011680"/>
-            <a:ext cx="6400800" cy="736092"/>
+            <a:off x="777240" y="2377440"/>
+            <a:ext cx="5943600" cy="411480"/>
           </a:xfrm>
           <a:prstGeom prst="rect">
             <a:avLst/>
@@ -3284,13 +3284,13 @@
           <a:noFill/>
         </p:spPr>
         <p:txBody>
-          <a:bodyPr wrap="square" tIns="25400" bIns="0" lIns="0">
+          <a:bodyPr wrap="square">
             <a:spAutoFit/>
           </a:bodyPr>
           <a:lstStyle/>
           <a:p>
             <a:pPr>
-              <a:defRPr sz="800">
+              <a:defRPr sz="1000">
                 <a:solidFill>
                   <a:srgbClr val="CCCCCC"/>
                 </a:solidFill>
@@ -3298,7 +3298,7 @@
               </a:defRPr>
             </a:pPr>
             <a:r>
-              <a:t>The parallel scan operation can logically divide a table into multiple segments, with multiple appli</a:t>
+              <a:t>The parallel scan operation can logically divide a table into multiple segments, with multiple application workers scann</a:t>
             </a:r>
           </a:p>
         </p:txBody>
@@ -3311,8 +3311,8 @@
         </p:nvSpPr>
         <p:spPr>
           <a:xfrm>
-            <a:off x="274320" y="2811780"/>
-            <a:ext cx="201168" cy="201168"/>
+            <a:off x="365760" y="2834640"/>
+            <a:ext cx="274320" cy="274320"/>
           </a:xfrm>
           <a:prstGeom prst="ellipse">
             <a:avLst/>
@@ -3343,7 +3343,7 @@
           <a:lstStyle/>
           <a:p>
             <a:pPr algn="ctr">
-              <a:defRPr sz="700" b="1">
+              <a:defRPr sz="900" b="1">
                 <a:solidFill>
                   <a:srgbClr val="FFFFFF"/>
                 </a:solidFill>
@@ -3363,8 +3363,8 @@
         </p:nvSpPr>
         <p:spPr>
           <a:xfrm>
-            <a:off x="548640" y="2766060"/>
-            <a:ext cx="6400800" cy="736092"/>
+            <a:off x="777240" y="2834640"/>
+            <a:ext cx="5943600" cy="411480"/>
           </a:xfrm>
           <a:prstGeom prst="rect">
             <a:avLst/>
@@ -3372,13 +3372,13 @@
           <a:noFill/>
         </p:spPr>
         <p:txBody>
-          <a:bodyPr wrap="square" tIns="25400" bIns="0" lIns="0">
+          <a:bodyPr wrap="square">
             <a:spAutoFit/>
           </a:bodyPr>
           <a:lstStyle/>
           <a:p>
             <a:pPr>
-              <a:defRPr sz="800">
+              <a:defRPr sz="1000">
                 <a:solidFill>
                   <a:srgbClr val="CCCCCC"/>
                 </a:solidFill>
@@ -3386,7 +3386,7 @@
               </a:defRPr>
             </a:pPr>
             <a:r>
-              <a:t>A filter expression applies additional matching criteria to limit the items returned. This expressio</a:t>
+              <a:t>A filter expression applies additional matching criteria to limit the items returned. This expression does not provide a</a:t>
             </a:r>
           </a:p>
         </p:txBody>
@@ -3399,8 +3399,8 @@
         </p:nvSpPr>
         <p:spPr>
           <a:xfrm>
-            <a:off x="274320" y="3566160"/>
-            <a:ext cx="201168" cy="201168"/>
+            <a:off x="365760" y="3291840"/>
+            <a:ext cx="274320" cy="274320"/>
           </a:xfrm>
           <a:prstGeom prst="ellipse">
             <a:avLst/>
@@ -3431,7 +3431,7 @@
           <a:lstStyle/>
           <a:p>
             <a:pPr algn="ctr">
-              <a:defRPr sz="700" b="1">
+              <a:defRPr sz="900" b="1">
                 <a:solidFill>
                   <a:srgbClr val="FFFFFF"/>
                 </a:solidFill>
@@ -3451,8 +3451,8 @@
         </p:nvSpPr>
         <p:spPr>
           <a:xfrm>
-            <a:off x="548640" y="3520440"/>
-            <a:ext cx="6400800" cy="736092"/>
+            <a:off x="777240" y="3291840"/>
+            <a:ext cx="5943600" cy="411480"/>
           </a:xfrm>
           <a:prstGeom prst="rect">
             <a:avLst/>
@@ -3460,13 +3460,13 @@
           <a:noFill/>
         </p:spPr>
         <p:txBody>
-          <a:bodyPr wrap="square" tIns="25400" bIns="0" lIns="0">
+          <a:bodyPr wrap="square">
             <a:spAutoFit/>
           </a:bodyPr>
           <a:lstStyle/>
           <a:p>
             <a:pPr>
-              <a:defRPr sz="800">
+              <a:defRPr sz="1000">
                 <a:solidFill>
                   <a:srgbClr val="CCCCCC"/>
                 </a:solidFill>
@@ -3474,7 +3474,7 @@
               </a:defRPr>
             </a:pPr>
             <a:r>
-              <a:t>Set the limit parameter to 1 to set the maximum number of items that need to be retrieved with a Dyn</a:t>
+              <a:t>Set the limit parameter to 1 to set the maximum number of items that need to be retrieved with a DynamoDB scan operation</a:t>
             </a:r>
           </a:p>
         </p:txBody>
@@ -3487,8 +3487,8 @@
         </p:nvSpPr>
         <p:spPr>
           <a:xfrm>
-            <a:off x="274320" y="4320540"/>
-            <a:ext cx="201168" cy="201168"/>
+            <a:off x="365760" y="3749039"/>
+            <a:ext cx="274320" cy="274320"/>
           </a:xfrm>
           <a:prstGeom prst="ellipse">
             <a:avLst/>
@@ -3519,7 +3519,7 @@
           <a:lstStyle/>
           <a:p>
             <a:pPr algn="ctr">
-              <a:defRPr sz="700" b="1">
+              <a:defRPr sz="900" b="1">
                 <a:solidFill>
                   <a:srgbClr val="FFFFFF"/>
                 </a:solidFill>
@@ -3539,8 +3539,8 @@
         </p:nvSpPr>
         <p:spPr>
           <a:xfrm>
-            <a:off x="548640" y="4274820"/>
-            <a:ext cx="6400800" cy="736092"/>
+            <a:off x="777240" y="3749039"/>
+            <a:ext cx="5943600" cy="411480"/>
           </a:xfrm>
           <a:prstGeom prst="rect">
             <a:avLst/>
@@ -3548,13 +3548,13 @@
           <a:noFill/>
         </p:spPr>
         <p:txBody>
-          <a:bodyPr wrap="square" tIns="25400" bIns="0" lIns="0">
+          <a:bodyPr wrap="square">
             <a:spAutoFit/>
           </a:bodyPr>
           <a:lstStyle/>
           <a:p>
             <a:pPr>
-              <a:defRPr sz="800">
+              <a:defRPr sz="1000">
                 <a:solidFill>
                   <a:srgbClr val="CCCCCC"/>
                 </a:solidFill>
@@ -3562,7 +3562,7 @@
               </a:defRPr>
             </a:pPr>
             <a:r>
-              <a:t>The page-size parameter will determine the number of items returned in each page of a query. This me</a:t>
+              <a:t>The page-size parameter will determine the number of items returned in each page of a query. This method is only relevan</a:t>
             </a:r>
           </a:p>
         </p:txBody>
@@ -3844,8 +3844,8 @@
         </p:blipFill>
         <p:spPr>
           <a:xfrm>
-            <a:off x="182880" y="995897"/>
-            <a:ext cx="5303520" cy="3677485"/>
+            <a:off x="182880" y="914400"/>
+            <a:ext cx="2922262" cy="3840480"/>
           </a:xfrm>
           <a:prstGeom prst="rect">
             <a:avLst/>
@@ -3980,9 +3980,9 @@
           <a:p>
             <a:pPr>
               <a:spcAft>
-                <a:spcPts val="400"/>
+                <a:spcPts val="600"/>
               </a:spcAft>
-              <a:defRPr sz="800">
+              <a:defRPr sz="900">
                 <a:solidFill>
                   <a:srgbClr val="212121"/>
                 </a:solidFill>
@@ -3990,15 +3990,15 @@
               </a:defRPr>
             </a:pPr>
             <a:r>
-              <a:t>• The parallel scan operation can logically divide a table into multiple segments</a:t>
+              <a:t>• The parallel scan operation can logically divide a table into multiple segments, with multiple application workers scanning the segments in parallel.</a:t>
             </a:r>
           </a:p>
           <a:p>
             <a:pPr>
               <a:spcAft>
-                <a:spcPts val="400"/>
+                <a:spcPts val="600"/>
               </a:spcAft>
-              <a:defRPr sz="800">
+              <a:defRPr sz="900">
                 <a:solidFill>
                   <a:srgbClr val="212121"/>
                 </a:solidFill>
@@ -4006,15 +4006,15 @@
               </a:defRPr>
             </a:pPr>
             <a:r>
-              <a:t>• With multiple application workers scanning the segments in parallel</a:t>
+              <a:t>• Parallel scan returns the same number of results as an ordinary scan, except the results can be returned more quickly.</a:t>
             </a:r>
           </a:p>
           <a:p>
             <a:pPr>
               <a:spcAft>
-                <a:spcPts val="400"/>
+                <a:spcPts val="600"/>
               </a:spcAft>
-              <a:defRPr sz="800">
+              <a:defRPr sz="900">
                 <a:solidFill>
                   <a:srgbClr val="212121"/>
                 </a:solidFill>
@@ -4022,39 +4022,7 @@
               </a:defRPr>
             </a:pPr>
             <a:r>
-              <a:t>• Parallel scan returns the same number of results as an ordinary scan</a:t>
-            </a:r>
-          </a:p>
-          <a:p>
-            <a:pPr>
-              <a:spcAft>
-                <a:spcPts val="400"/>
-              </a:spcAft>
-              <a:defRPr sz="800">
-                <a:solidFill>
-                  <a:srgbClr val="212121"/>
-                </a:solidFill>
-                <a:latin typeface="Segoe UI"/>
-              </a:defRPr>
-            </a:pPr>
-            <a:r>
-              <a:t>• Except the results can be returned more quickly</a:t>
-            </a:r>
-          </a:p>
-          <a:p>
-            <a:pPr>
-              <a:spcAft>
-                <a:spcPts val="400"/>
-              </a:spcAft>
-              <a:defRPr sz="800">
-                <a:solidFill>
-                  <a:srgbClr val="212121"/>
-                </a:solidFill>
-                <a:latin typeface="Segoe UI"/>
-              </a:defRPr>
-            </a:pPr>
-            <a:r>
-              <a:t>• Parallel scan does not limit the number of items returned</a:t>
+              <a:t>• Parallel scan does not limit the number of items returned.</a:t>
             </a:r>
           </a:p>
         </p:txBody>
@@ -4233,8 +4201,8 @@
         </p:blipFill>
         <p:spPr>
           <a:xfrm>
-            <a:off x="182880" y="1717415"/>
-            <a:ext cx="5303520" cy="2234448"/>
+            <a:off x="182880" y="1729168"/>
+            <a:ext cx="5303520" cy="2210942"/>
           </a:xfrm>
           <a:prstGeom prst="rect">
             <a:avLst/>
@@ -4369,9 +4337,9 @@
           <a:p>
             <a:pPr>
               <a:spcAft>
-                <a:spcPts val="400"/>
+                <a:spcPts val="600"/>
               </a:spcAft>
-              <a:defRPr sz="800">
+              <a:defRPr sz="900">
                 <a:solidFill>
                   <a:srgbClr val="212121"/>
                 </a:solidFill>
@@ -4379,15 +4347,15 @@
               </a:defRPr>
             </a:pPr>
             <a:r>
-              <a:t>• A filter expression applies additional matching criteria to limit the items returned</a:t>
+              <a:t>• A filter expression applies additional matching criteria to limit the items returned.</a:t>
             </a:r>
           </a:p>
           <a:p>
             <a:pPr>
               <a:spcAft>
-                <a:spcPts val="400"/>
+                <a:spcPts val="600"/>
               </a:spcAft>
-              <a:defRPr sz="800">
+              <a:defRPr sz="900">
                 <a:solidFill>
                   <a:srgbClr val="212121"/>
                 </a:solidFill>
@@ -4395,7 +4363,7 @@
               </a:defRPr>
             </a:pPr>
             <a:r>
-              <a:t>• This expression does not provide a specific limit on the number of items returned</a:t>
+              <a:t>• This expression does not provide a specific limit on the number of items returned.</a:t>
             </a:r>
           </a:p>
         </p:txBody>
@@ -4574,8 +4542,8 @@
         </p:blipFill>
         <p:spPr>
           <a:xfrm>
-            <a:off x="182880" y="1217299"/>
-            <a:ext cx="5303520" cy="3234680"/>
+            <a:off x="182880" y="1737672"/>
+            <a:ext cx="5303520" cy="2193934"/>
           </a:xfrm>
           <a:prstGeom prst="rect">
             <a:avLst/>
@@ -4710,9 +4678,9 @@
           <a:p>
             <a:pPr>
               <a:spcAft>
-                <a:spcPts val="400"/>
+                <a:spcPts val="600"/>
               </a:spcAft>
-              <a:defRPr sz="800">
+              <a:defRPr sz="900">
                 <a:solidFill>
                   <a:srgbClr val="212121"/>
                 </a:solidFill>
@@ -4720,7 +4688,7 @@
               </a:defRPr>
             </a:pPr>
             <a:r>
-              <a:t>• Set the limit parameter to 1 to set the maximum number of items that need to be retrieved with a DynamoDB scan operation</a:t>
+              <a:t>• Set the limit parameter to 1 to set the maximum number of items that need to be retrieved with a DynamoDB scan operation.</a:t>
             </a:r>
           </a:p>
         </p:txBody>
@@ -4899,8 +4867,8 @@
         </p:blipFill>
         <p:spPr>
           <a:xfrm>
-            <a:off x="182880" y="1836497"/>
-            <a:ext cx="5303520" cy="1996284"/>
+            <a:off x="182880" y="914400"/>
+            <a:ext cx="4071619" cy="3840480"/>
           </a:xfrm>
           <a:prstGeom prst="rect">
             <a:avLst/>
@@ -5035,9 +5003,9 @@
           <a:p>
             <a:pPr>
               <a:spcAft>
-                <a:spcPts val="400"/>
+                <a:spcPts val="600"/>
               </a:spcAft>
-              <a:defRPr sz="800">
+              <a:defRPr sz="900">
                 <a:solidFill>
                   <a:srgbClr val="212121"/>
                 </a:solidFill>
@@ -5045,15 +5013,15 @@
               </a:defRPr>
             </a:pPr>
             <a:r>
-              <a:t>• The page-size parameter will determine the number of items returned in each page of a query</a:t>
+              <a:t>• The page-size parameter will determine the number of items returned in each page of a query.</a:t>
             </a:r>
           </a:p>
           <a:p>
             <a:pPr>
               <a:spcAft>
-                <a:spcPts val="400"/>
+                <a:spcPts val="600"/>
               </a:spcAft>
-              <a:defRPr sz="800">
+              <a:defRPr sz="900">
                 <a:solidFill>
                   <a:srgbClr val="212121"/>
                 </a:solidFill>
@@ -5061,7 +5029,7 @@
               </a:defRPr>
             </a:pPr>
             <a:r>
-              <a:t>• This method is only relevant for queries that involve the key</a:t>
+              <a:t>• This method is only relevant for queries that involve the key.</a:t>
             </a:r>
           </a:p>
         </p:txBody>
